--- a/Slides/Model/Pose_Model_01.pptx
+++ b/Slides/Model/Pose_Model_01.pptx
@@ -7906,7 +7906,16 @@
                 <a:cs typeface="Calibri"/>
                 <a:sym typeface="Calibri"/>
               </a:rPr>
-              <a:t>Pose Representation</a:t>
+              <a:t>Pose </a:t>
+            </a:r>
+            <a:r>
+              <a:rPr lang="en-US" sz="4800" dirty="0">
+                <a:latin typeface="Calibri"/>
+                <a:ea typeface="Calibri"/>
+                <a:cs typeface="Calibri"/>
+                <a:sym typeface="Calibri"/>
+              </a:rPr>
+              <a:t>Model</a:t>
             </a:r>
             <a:endParaRPr sz="8600" dirty="0">
               <a:latin typeface="Calibri"/>
@@ -8098,13 +8107,22 @@
               <a:buNone/>
             </a:pPr>
             <a:r>
+              <a:rPr lang="en-US" dirty="0">
+                <a:latin typeface="Calibri"/>
+                <a:ea typeface="Calibri"/>
+                <a:cs typeface="Calibri"/>
+                <a:sym typeface="Calibri"/>
+              </a:rPr>
+              <a:t>Model</a:t>
+            </a:r>
+            <a:r>
               <a:rPr lang="en" dirty="0">
                 <a:latin typeface="Calibri"/>
                 <a:ea typeface="Calibri"/>
                 <a:cs typeface="Calibri"/>
                 <a:sym typeface="Calibri"/>
               </a:rPr>
-              <a:t>Representation-01</a:t>
+              <a:t>-01</a:t>
             </a:r>
             <a:endParaRPr dirty="0">
               <a:latin typeface="Calibri"/>
@@ -8217,13 +8235,22 @@
               <a:buNone/>
             </a:pPr>
             <a:r>
+              <a:rPr lang="en-US" dirty="0">
+                <a:latin typeface="Calibri"/>
+                <a:ea typeface="Calibri"/>
+                <a:cs typeface="Calibri"/>
+                <a:sym typeface="Calibri"/>
+              </a:rPr>
+              <a:t>Model</a:t>
+            </a:r>
+            <a:r>
               <a:rPr lang="en" dirty="0">
                 <a:latin typeface="Calibri"/>
                 <a:ea typeface="Calibri"/>
                 <a:cs typeface="Calibri"/>
                 <a:sym typeface="Calibri"/>
               </a:rPr>
-              <a:t>Representation-01</a:t>
+              <a:t>-01</a:t>
             </a:r>
             <a:endParaRPr dirty="0">
               <a:latin typeface="Calibri"/>
@@ -8336,13 +8363,22 @@
               <a:buNone/>
             </a:pPr>
             <a:r>
+              <a:rPr lang="en-US" dirty="0">
+                <a:latin typeface="Calibri"/>
+                <a:ea typeface="Calibri"/>
+                <a:cs typeface="Calibri"/>
+                <a:sym typeface="Calibri"/>
+              </a:rPr>
+              <a:t>Model</a:t>
+            </a:r>
+            <a:r>
               <a:rPr lang="en" dirty="0">
                 <a:latin typeface="Calibri"/>
                 <a:ea typeface="Calibri"/>
                 <a:cs typeface="Calibri"/>
                 <a:sym typeface="Calibri"/>
               </a:rPr>
-              <a:t>Representation-01</a:t>
+              <a:t>-01</a:t>
             </a:r>
             <a:endParaRPr dirty="0">
               <a:latin typeface="Calibri"/>
@@ -8455,13 +8491,22 @@
               <a:buNone/>
             </a:pPr>
             <a:r>
+              <a:rPr lang="en-US" dirty="0">
+                <a:latin typeface="Calibri"/>
+                <a:ea typeface="Calibri"/>
+                <a:cs typeface="Calibri"/>
+                <a:sym typeface="Calibri"/>
+              </a:rPr>
+              <a:t>Model</a:t>
+            </a:r>
+            <a:r>
               <a:rPr lang="en" dirty="0">
                 <a:latin typeface="Calibri"/>
                 <a:ea typeface="Calibri"/>
                 <a:cs typeface="Calibri"/>
                 <a:sym typeface="Calibri"/>
               </a:rPr>
-              <a:t>Representation-01</a:t>
+              <a:t>-01</a:t>
             </a:r>
             <a:endParaRPr dirty="0">
               <a:latin typeface="Calibri"/>
@@ -8574,13 +8619,22 @@
               <a:buNone/>
             </a:pPr>
             <a:r>
+              <a:rPr lang="en-US" dirty="0">
+                <a:latin typeface="Calibri"/>
+                <a:ea typeface="Calibri"/>
+                <a:cs typeface="Calibri"/>
+                <a:sym typeface="Calibri"/>
+              </a:rPr>
+              <a:t>Model</a:t>
+            </a:r>
+            <a:r>
               <a:rPr lang="en" dirty="0">
                 <a:latin typeface="Calibri"/>
                 <a:ea typeface="Calibri"/>
                 <a:cs typeface="Calibri"/>
                 <a:sym typeface="Calibri"/>
               </a:rPr>
-              <a:t>Representation-01</a:t>
+              <a:t>-01</a:t>
             </a:r>
             <a:endParaRPr dirty="0">
               <a:latin typeface="Calibri"/>
@@ -8693,13 +8747,22 @@
               <a:buNone/>
             </a:pPr>
             <a:r>
+              <a:rPr lang="en-US" dirty="0">
+                <a:latin typeface="Calibri"/>
+                <a:ea typeface="Calibri"/>
+                <a:cs typeface="Calibri"/>
+                <a:sym typeface="Calibri"/>
+              </a:rPr>
+              <a:t>Model</a:t>
+            </a:r>
+            <a:r>
               <a:rPr lang="en" dirty="0">
                 <a:latin typeface="Calibri"/>
                 <a:ea typeface="Calibri"/>
                 <a:cs typeface="Calibri"/>
                 <a:sym typeface="Calibri"/>
               </a:rPr>
-              <a:t>Representation-01</a:t>
+              <a:t>-01</a:t>
             </a:r>
             <a:endParaRPr dirty="0">
               <a:latin typeface="Calibri"/>
@@ -8812,13 +8875,22 @@
               <a:buNone/>
             </a:pPr>
             <a:r>
+              <a:rPr lang="en-US" dirty="0">
+                <a:latin typeface="Calibri"/>
+                <a:ea typeface="Calibri"/>
+                <a:cs typeface="Calibri"/>
+                <a:sym typeface="Calibri"/>
+              </a:rPr>
+              <a:t>Model</a:t>
+            </a:r>
+            <a:r>
               <a:rPr lang="en" dirty="0">
                 <a:latin typeface="Calibri"/>
                 <a:ea typeface="Calibri"/>
                 <a:cs typeface="Calibri"/>
                 <a:sym typeface="Calibri"/>
               </a:rPr>
-              <a:t>Representation-01</a:t>
+              <a:t>-01</a:t>
             </a:r>
             <a:endParaRPr dirty="0">
               <a:latin typeface="Calibri"/>
@@ -8931,13 +9003,22 @@
               <a:buNone/>
             </a:pPr>
             <a:r>
+              <a:rPr lang="en-US" dirty="0">
+                <a:latin typeface="Calibri"/>
+                <a:ea typeface="Calibri"/>
+                <a:cs typeface="Calibri"/>
+                <a:sym typeface="Calibri"/>
+              </a:rPr>
+              <a:t>Model</a:t>
+            </a:r>
+            <a:r>
               <a:rPr lang="en" dirty="0">
                 <a:latin typeface="Calibri"/>
                 <a:ea typeface="Calibri"/>
                 <a:cs typeface="Calibri"/>
                 <a:sym typeface="Calibri"/>
               </a:rPr>
-              <a:t>Representation-01</a:t>
+              <a:t>-01</a:t>
             </a:r>
             <a:endParaRPr dirty="0">
               <a:latin typeface="Calibri"/>
@@ -9192,13 +9273,22 @@
               <a:buNone/>
             </a:pPr>
             <a:r>
+              <a:rPr lang="en-US" dirty="0">
+                <a:latin typeface="Calibri"/>
+                <a:ea typeface="Calibri"/>
+                <a:cs typeface="Calibri"/>
+                <a:sym typeface="Calibri"/>
+              </a:rPr>
+              <a:t>Model</a:t>
+            </a:r>
+            <a:r>
               <a:rPr lang="en" dirty="0">
                 <a:latin typeface="Calibri"/>
                 <a:ea typeface="Calibri"/>
                 <a:cs typeface="Calibri"/>
                 <a:sym typeface="Calibri"/>
               </a:rPr>
-              <a:t>Representation-01</a:t>
+              <a:t>-01</a:t>
             </a:r>
             <a:endParaRPr dirty="0">
               <a:latin typeface="Calibri"/>
@@ -9227,10 +9317,50 @@
         </p:nvSpPr>
         <p:spPr/>
         <p:txBody>
-          <a:bodyPr/>
+          <a:bodyPr>
+            <a:normAutofit fontScale="25000" lnSpcReduction="20000"/>
+          </a:bodyPr>
           <a:lstStyle/>
           <a:p>
-            <a:endParaRPr lang="en-US"/>
+            <a:r>
+              <a:rPr lang="en-US" dirty="0"/>
+              <a:t>Why do we need a conceptual model?</a:t>
+            </a:r>
+          </a:p>
+          <a:p>
+            <a:r>
+              <a:rPr lang="en-US" dirty="0"/>
+              <a:t>Why are there multiple concepts for same thing?</a:t>
+            </a:r>
+          </a:p>
+          <a:p>
+            <a:r>
+              <a:rPr lang="en-US" dirty="0"/>
+              <a:t>Frame transform + orientation</a:t>
+            </a:r>
+          </a:p>
+          <a:p>
+            <a:r>
+              <a:rPr lang="en-US" dirty="0"/>
+              <a:t>Different ways of specifying transform</a:t>
+            </a:r>
+          </a:p>
+          <a:p>
+            <a:r>
+              <a:rPr lang="en-US" dirty="0"/>
+              <a:t>Different ways of specifying orientation</a:t>
+            </a:r>
+          </a:p>
+          <a:p>
+            <a:r>
+              <a:rPr lang="en-US" dirty="0"/>
+              <a:t>Not all equivalent or same </a:t>
+            </a:r>
+            <a:r>
+              <a:rPr lang="en-US" dirty="0" err="1"/>
+              <a:t>behaviour</a:t>
+            </a:r>
+            <a:endParaRPr lang="en-US" dirty="0"/>
           </a:p>
         </p:txBody>
       </p:sp>
@@ -9306,13 +9436,22 @@
               <a:buNone/>
             </a:pPr>
             <a:r>
+              <a:rPr lang="en-US" dirty="0">
+                <a:latin typeface="Calibri"/>
+                <a:ea typeface="Calibri"/>
+                <a:cs typeface="Calibri"/>
+                <a:sym typeface="Calibri"/>
+              </a:rPr>
+              <a:t>Model</a:t>
+            </a:r>
+            <a:r>
               <a:rPr lang="en" dirty="0">
                 <a:latin typeface="Calibri"/>
                 <a:ea typeface="Calibri"/>
                 <a:cs typeface="Calibri"/>
                 <a:sym typeface="Calibri"/>
               </a:rPr>
-              <a:t>Representation-01</a:t>
+              <a:t>-01</a:t>
             </a:r>
             <a:endParaRPr dirty="0">
               <a:latin typeface="Calibri"/>
@@ -9425,13 +9564,22 @@
               <a:buNone/>
             </a:pPr>
             <a:r>
+              <a:rPr lang="en-US" dirty="0">
+                <a:latin typeface="Calibri"/>
+                <a:ea typeface="Calibri"/>
+                <a:cs typeface="Calibri"/>
+                <a:sym typeface="Calibri"/>
+              </a:rPr>
+              <a:t>Model</a:t>
+            </a:r>
+            <a:r>
               <a:rPr lang="en" dirty="0">
                 <a:latin typeface="Calibri"/>
                 <a:ea typeface="Calibri"/>
                 <a:cs typeface="Calibri"/>
                 <a:sym typeface="Calibri"/>
               </a:rPr>
-              <a:t>Representation-01</a:t>
+              <a:t>-01</a:t>
             </a:r>
             <a:endParaRPr dirty="0">
               <a:latin typeface="Calibri"/>
@@ -9544,13 +9692,22 @@
               <a:buNone/>
             </a:pPr>
             <a:r>
+              <a:rPr lang="en-US" dirty="0">
+                <a:latin typeface="Calibri"/>
+                <a:ea typeface="Calibri"/>
+                <a:cs typeface="Calibri"/>
+                <a:sym typeface="Calibri"/>
+              </a:rPr>
+              <a:t>Model</a:t>
+            </a:r>
+            <a:r>
               <a:rPr lang="en" dirty="0">
                 <a:latin typeface="Calibri"/>
                 <a:ea typeface="Calibri"/>
                 <a:cs typeface="Calibri"/>
                 <a:sym typeface="Calibri"/>
               </a:rPr>
-              <a:t>Representation-01</a:t>
+              <a:t>-01</a:t>
             </a:r>
             <a:endParaRPr dirty="0">
               <a:latin typeface="Calibri"/>
@@ -9663,13 +9820,22 @@
               <a:buNone/>
             </a:pPr>
             <a:r>
+              <a:rPr lang="en-US" dirty="0">
+                <a:latin typeface="Calibri"/>
+                <a:ea typeface="Calibri"/>
+                <a:cs typeface="Calibri"/>
+                <a:sym typeface="Calibri"/>
+              </a:rPr>
+              <a:t>Model</a:t>
+            </a:r>
+            <a:r>
               <a:rPr lang="en" dirty="0">
                 <a:latin typeface="Calibri"/>
                 <a:ea typeface="Calibri"/>
                 <a:cs typeface="Calibri"/>
                 <a:sym typeface="Calibri"/>
               </a:rPr>
-              <a:t>Representation-01</a:t>
+              <a:t>-01</a:t>
             </a:r>
             <a:endParaRPr dirty="0">
               <a:latin typeface="Calibri"/>
@@ -9782,13 +9948,22 @@
               <a:buNone/>
             </a:pPr>
             <a:r>
+              <a:rPr lang="en-US" dirty="0">
+                <a:latin typeface="Calibri"/>
+                <a:ea typeface="Calibri"/>
+                <a:cs typeface="Calibri"/>
+                <a:sym typeface="Calibri"/>
+              </a:rPr>
+              <a:t>Model</a:t>
+            </a:r>
+            <a:r>
               <a:rPr lang="en" dirty="0">
                 <a:latin typeface="Calibri"/>
                 <a:ea typeface="Calibri"/>
                 <a:cs typeface="Calibri"/>
                 <a:sym typeface="Calibri"/>
               </a:rPr>
-              <a:t>Representation-01</a:t>
+              <a:t>-01</a:t>
             </a:r>
             <a:endParaRPr dirty="0">
               <a:latin typeface="Calibri"/>
@@ -9901,13 +10076,22 @@
               <a:buNone/>
             </a:pPr>
             <a:r>
+              <a:rPr lang="en-US" dirty="0">
+                <a:latin typeface="Calibri"/>
+                <a:ea typeface="Calibri"/>
+                <a:cs typeface="Calibri"/>
+                <a:sym typeface="Calibri"/>
+              </a:rPr>
+              <a:t>Model</a:t>
+            </a:r>
+            <a:r>
               <a:rPr lang="en" dirty="0">
                 <a:latin typeface="Calibri"/>
                 <a:ea typeface="Calibri"/>
                 <a:cs typeface="Calibri"/>
                 <a:sym typeface="Calibri"/>
               </a:rPr>
-              <a:t>Representation-01</a:t>
+              <a:t>-01</a:t>
             </a:r>
             <a:endParaRPr dirty="0">
               <a:latin typeface="Calibri"/>
